--- a/files/SNPE_Presentation.pptx
+++ b/files/SNPE_Presentation.pptx
@@ -52,21 +52,22 @@
     <p:sldId id="317" r:id="rId46"/>
     <p:sldId id="311" r:id="rId47"/>
     <p:sldId id="310" r:id="rId48"/>
-    <p:sldId id="312" r:id="rId49"/>
-    <p:sldId id="330" r:id="rId50"/>
-    <p:sldId id="339" r:id="rId51"/>
-    <p:sldId id="335" r:id="rId52"/>
-    <p:sldId id="336" r:id="rId53"/>
-    <p:sldId id="337" r:id="rId54"/>
-    <p:sldId id="332" r:id="rId55"/>
-    <p:sldId id="333" r:id="rId56"/>
-    <p:sldId id="334" r:id="rId57"/>
-    <p:sldId id="331" r:id="rId58"/>
-    <p:sldId id="325" r:id="rId59"/>
-    <p:sldId id="329" r:id="rId60"/>
-    <p:sldId id="279" r:id="rId61"/>
-    <p:sldId id="338" r:id="rId62"/>
-    <p:sldId id="328" r:id="rId63"/>
+    <p:sldId id="341" r:id="rId49"/>
+    <p:sldId id="312" r:id="rId50"/>
+    <p:sldId id="330" r:id="rId51"/>
+    <p:sldId id="339" r:id="rId52"/>
+    <p:sldId id="335" r:id="rId53"/>
+    <p:sldId id="336" r:id="rId54"/>
+    <p:sldId id="337" r:id="rId55"/>
+    <p:sldId id="332" r:id="rId56"/>
+    <p:sldId id="333" r:id="rId57"/>
+    <p:sldId id="334" r:id="rId58"/>
+    <p:sldId id="331" r:id="rId59"/>
+    <p:sldId id="325" r:id="rId60"/>
+    <p:sldId id="329" r:id="rId61"/>
+    <p:sldId id="279" r:id="rId62"/>
+    <p:sldId id="338" r:id="rId63"/>
+    <p:sldId id="328" r:id="rId64"/>
   </p:sldIdLst>
   <p:sldSz cx="12192000" cy="6858000"/>
   <p:notesSz cx="6858000" cy="9144000"/>
@@ -320,7 +321,7 @@
           <a:p>
             <a:fld id="{FC1F25CA-4E25-4AF8-8E18-92FDF20BC177}" type="datetimeFigureOut">
               <a:rPr lang="en-US" smtClean="0"/>
-              <a:t>7/30/2023</a:t>
+              <a:t>8/1/2023</a:t>
             </a:fld>
             <a:endParaRPr lang="en-US"/>
           </a:p>
@@ -518,7 +519,7 @@
           <a:p>
             <a:fld id="{FC1F25CA-4E25-4AF8-8E18-92FDF20BC177}" type="datetimeFigureOut">
               <a:rPr lang="en-US" smtClean="0"/>
-              <a:t>7/30/2023</a:t>
+              <a:t>8/1/2023</a:t>
             </a:fld>
             <a:endParaRPr lang="en-US"/>
           </a:p>
@@ -726,7 +727,7 @@
           <a:p>
             <a:fld id="{FC1F25CA-4E25-4AF8-8E18-92FDF20BC177}" type="datetimeFigureOut">
               <a:rPr lang="en-US" smtClean="0"/>
-              <a:t>7/30/2023</a:t>
+              <a:t>8/1/2023</a:t>
             </a:fld>
             <a:endParaRPr lang="en-US"/>
           </a:p>
@@ -924,7 +925,7 @@
           <a:p>
             <a:fld id="{FC1F25CA-4E25-4AF8-8E18-92FDF20BC177}" type="datetimeFigureOut">
               <a:rPr lang="en-US" smtClean="0"/>
-              <a:t>7/30/2023</a:t>
+              <a:t>8/1/2023</a:t>
             </a:fld>
             <a:endParaRPr lang="en-US"/>
           </a:p>
@@ -1199,7 +1200,7 @@
           <a:p>
             <a:fld id="{FC1F25CA-4E25-4AF8-8E18-92FDF20BC177}" type="datetimeFigureOut">
               <a:rPr lang="en-US" smtClean="0"/>
-              <a:t>7/30/2023</a:t>
+              <a:t>8/1/2023</a:t>
             </a:fld>
             <a:endParaRPr lang="en-US"/>
           </a:p>
@@ -1464,7 +1465,7 @@
           <a:p>
             <a:fld id="{FC1F25CA-4E25-4AF8-8E18-92FDF20BC177}" type="datetimeFigureOut">
               <a:rPr lang="en-US" smtClean="0"/>
-              <a:t>7/30/2023</a:t>
+              <a:t>8/1/2023</a:t>
             </a:fld>
             <a:endParaRPr lang="en-US"/>
           </a:p>
@@ -1876,7 +1877,7 @@
           <a:p>
             <a:fld id="{FC1F25CA-4E25-4AF8-8E18-92FDF20BC177}" type="datetimeFigureOut">
               <a:rPr lang="en-US" smtClean="0"/>
-              <a:t>7/30/2023</a:t>
+              <a:t>8/1/2023</a:t>
             </a:fld>
             <a:endParaRPr lang="en-US"/>
           </a:p>
@@ -2017,7 +2018,7 @@
           <a:p>
             <a:fld id="{FC1F25CA-4E25-4AF8-8E18-92FDF20BC177}" type="datetimeFigureOut">
               <a:rPr lang="en-US" smtClean="0"/>
-              <a:t>7/30/2023</a:t>
+              <a:t>8/1/2023</a:t>
             </a:fld>
             <a:endParaRPr lang="en-US"/>
           </a:p>
@@ -2130,7 +2131,7 @@
           <a:p>
             <a:fld id="{FC1F25CA-4E25-4AF8-8E18-92FDF20BC177}" type="datetimeFigureOut">
               <a:rPr lang="en-US" smtClean="0"/>
-              <a:t>7/30/2023</a:t>
+              <a:t>8/1/2023</a:t>
             </a:fld>
             <a:endParaRPr lang="en-US"/>
           </a:p>
@@ -2441,7 +2442,7 @@
           <a:p>
             <a:fld id="{FC1F25CA-4E25-4AF8-8E18-92FDF20BC177}" type="datetimeFigureOut">
               <a:rPr lang="en-US" smtClean="0"/>
-              <a:t>7/30/2023</a:t>
+              <a:t>8/1/2023</a:t>
             </a:fld>
             <a:endParaRPr lang="en-US"/>
           </a:p>
@@ -2729,7 +2730,7 @@
           <a:p>
             <a:fld id="{FC1F25CA-4E25-4AF8-8E18-92FDF20BC177}" type="datetimeFigureOut">
               <a:rPr lang="en-US" smtClean="0"/>
-              <a:t>7/30/2023</a:t>
+              <a:t>8/1/2023</a:t>
             </a:fld>
             <a:endParaRPr lang="en-US"/>
           </a:p>
@@ -2970,7 +2971,7 @@
           <a:p>
             <a:fld id="{FC1F25CA-4E25-4AF8-8E18-92FDF20BC177}" type="datetimeFigureOut">
               <a:rPr lang="en-US" smtClean="0"/>
-              <a:t>7/30/2023</a:t>
+              <a:t>8/1/2023</a:t>
             </a:fld>
             <a:endParaRPr lang="en-US"/>
           </a:p>
@@ -34977,7 +34978,7 @@
         <p:spPr/>
         <p:txBody>
           <a:bodyPr>
-            <a:normAutofit lnSpcReduction="10000"/>
+            <a:normAutofit fontScale="92500" lnSpcReduction="10000"/>
           </a:bodyPr>
           <a:lstStyle/>
           <a:p>
@@ -34987,9 +34988,9 @@
             </a:r>
           </a:p>
           <a:p>
-            <a:endParaRPr lang="en-US" dirty="0"/>
-          </a:p>
-          <a:p>
+            <a:pPr marL="0" indent="0">
+              <a:buNone/>
+            </a:pPr>
             <a:endParaRPr lang="en-US" dirty="0"/>
           </a:p>
           <a:p>
@@ -34999,7 +35000,16 @@
             </a:r>
           </a:p>
           <a:p>
+            <a:pPr marL="0" indent="0">
+              <a:buNone/>
+            </a:pPr>
             <a:endParaRPr lang="en-US" dirty="0"/>
+          </a:p>
+          <a:p>
+            <a:r>
+              <a:rPr lang="en-US" dirty="0"/>
+              <a:t>Within my SNPE procedure, I also introduce normalizing flows, for high dimensional density estimation </a:t>
+            </a:r>
           </a:p>
           <a:p>
             <a:endParaRPr lang="en-US" dirty="0"/>
@@ -35007,7 +35017,23 @@
           <a:p>
             <a:r>
               <a:rPr lang="en-US" dirty="0"/>
-              <a:t>Within my SNPE procedure, I also introduce normalizing flows, for high dimensional density estimation </a:t>
+              <a:t>Empirical application estimating </a:t>
+            </a:r>
+            <a:r>
+              <a:rPr lang="en-US" dirty="0" err="1"/>
+              <a:t>Krusell</a:t>
+            </a:r>
+            <a:r>
+              <a:rPr lang="en-US" dirty="0"/>
+              <a:t> Smith model solved via </a:t>
+            </a:r>
+            <a:r>
+              <a:rPr lang="en-US" dirty="0" err="1"/>
+              <a:t>Winberry</a:t>
+            </a:r>
+            <a:r>
+              <a:rPr lang="en-US" dirty="0"/>
+              <a:t> in a full information manner—with micro and macro moments</a:t>
             </a:r>
           </a:p>
           <a:p>
@@ -42875,7 +42901,7 @@
             </a:r>
             <a:r>
               <a:rPr lang="en-US" dirty="0" err="1"/>
-              <a:t>Krussell</a:t>
+              <a:t>Krusell</a:t>
             </a:r>
             <a:r>
               <a:rPr lang="en-US" dirty="0"/>
@@ -42944,7 +42970,7 @@
             </a:r>
             <a:r>
               <a:rPr lang="en-US" dirty="0"/>
-              <a:t>-Moller (2021) is state of the art, taking 6.5 min. per CPU iteration</a:t>
+              <a:t>-Moller (2023) is state of the art, taking 6.5 min. per CPU iteration</a:t>
             </a:r>
           </a:p>
           <a:p>
@@ -43036,6 +43062,173 @@
 </file>
 
 <file path=ppt/slides/slide48.xml><?xml version="1.0" encoding="utf-8"?>
+<p:sld xmlns:a="http://schemas.openxmlformats.org/drawingml/2006/main" xmlns:r="http://schemas.openxmlformats.org/officeDocument/2006/relationships" xmlns:p="http://schemas.openxmlformats.org/presentationml/2006/main">
+  <p:cSld>
+    <p:spTree>
+      <p:nvGrpSpPr>
+        <p:cNvPr id="1" name=""/>
+        <p:cNvGrpSpPr/>
+        <p:nvPr/>
+      </p:nvGrpSpPr>
+      <p:grpSpPr>
+        <a:xfrm>
+          <a:off x="0" y="0"/>
+          <a:ext cx="0" cy="0"/>
+          <a:chOff x="0" y="0"/>
+          <a:chExt cx="0" cy="0"/>
+        </a:xfrm>
+      </p:grpSpPr>
+      <p:sp>
+        <p:nvSpPr>
+          <p:cNvPr id="2" name="Title 1">
+            <a:extLst>
+              <a:ext uri="{FF2B5EF4-FFF2-40B4-BE49-F238E27FC236}">
+                <a16:creationId xmlns:a16="http://schemas.microsoft.com/office/drawing/2014/main" id="{72B65B23-8921-22CD-2DDE-ACDFCD8CB6BE}"/>
+              </a:ext>
+            </a:extLst>
+          </p:cNvPr>
+          <p:cNvSpPr>
+            <a:spLocks noGrp="1"/>
+          </p:cNvSpPr>
+          <p:nvPr>
+            <p:ph type="title"/>
+          </p:nvPr>
+        </p:nvSpPr>
+        <p:spPr/>
+        <p:txBody>
+          <a:bodyPr/>
+          <a:lstStyle/>
+          <a:p>
+            <a:r>
+              <a:rPr lang="en-US" dirty="0"/>
+              <a:t>Extending KS/</a:t>
+            </a:r>
+            <a:r>
+              <a:rPr lang="en-US" dirty="0" err="1"/>
+              <a:t>Winberry</a:t>
+            </a:r>
+            <a:r>
+              <a:rPr lang="en-US" dirty="0"/>
+              <a:t> to Full Information Empirical Application</a:t>
+            </a:r>
+          </a:p>
+        </p:txBody>
+      </p:sp>
+      <p:sp>
+        <p:nvSpPr>
+          <p:cNvPr id="3" name="Content Placeholder 2">
+            <a:extLst>
+              <a:ext uri="{FF2B5EF4-FFF2-40B4-BE49-F238E27FC236}">
+                <a16:creationId xmlns:a16="http://schemas.microsoft.com/office/drawing/2014/main" id="{7CE64BAC-1E62-F7ED-6F99-19C7FC8FBDC3}"/>
+              </a:ext>
+            </a:extLst>
+          </p:cNvPr>
+          <p:cNvSpPr>
+            <a:spLocks noGrp="1"/>
+          </p:cNvSpPr>
+          <p:nvPr>
+            <p:ph sz="half" idx="1"/>
+          </p:nvPr>
+        </p:nvSpPr>
+        <p:spPr/>
+        <p:txBody>
+          <a:bodyPr/>
+          <a:lstStyle/>
+          <a:p>
+            <a:r>
+              <a:rPr lang="en-US" dirty="0"/>
+              <a:t>KS/</a:t>
+            </a:r>
+            <a:r>
+              <a:rPr lang="en-US" dirty="0" err="1"/>
+              <a:t>Winberry</a:t>
+            </a:r>
+            <a:r>
+              <a:rPr lang="en-US" dirty="0"/>
+              <a:t> </a:t>
+            </a:r>
+            <a:r>
+              <a:rPr lang="en-US"/>
+              <a:t>model estimated across time </a:t>
+            </a:r>
+            <a:r>
+              <a:rPr lang="en-US" dirty="0"/>
+              <a:t>on 100 microdata </a:t>
+            </a:r>
+            <a:r>
+              <a:rPr lang="en-US"/>
+              <a:t>quantiles created </a:t>
+            </a:r>
+            <a:r>
+              <a:rPr lang="en-US" dirty="0"/>
+              <a:t>from the total household net worth variable in the SIPP dataset combined with macro data</a:t>
+            </a:r>
+          </a:p>
+          <a:p>
+            <a:r>
+              <a:rPr lang="en-US" dirty="0"/>
+              <a:t>Not attempted by Liu </a:t>
+            </a:r>
+            <a:r>
+              <a:rPr lang="en-US" dirty="0" err="1"/>
+              <a:t>Plagborg</a:t>
+            </a:r>
+            <a:r>
+              <a:rPr lang="en-US" dirty="0"/>
+              <a:t>-Moller (2023)</a:t>
+            </a:r>
+          </a:p>
+        </p:txBody>
+      </p:sp>
+      <p:pic>
+        <p:nvPicPr>
+          <p:cNvPr id="6" name="Content Placeholder 5" descr="A screenshot of a graph&#10;&#10;Description automatically generated">
+            <a:extLst>
+              <a:ext uri="{FF2B5EF4-FFF2-40B4-BE49-F238E27FC236}">
+                <a16:creationId xmlns:a16="http://schemas.microsoft.com/office/drawing/2014/main" id="{345CDEB3-A166-C5E1-7BC0-0FDA7D503AF8}"/>
+              </a:ext>
+            </a:extLst>
+          </p:cNvPr>
+          <p:cNvPicPr>
+            <a:picLocks noGrp="1" noChangeAspect="1"/>
+          </p:cNvPicPr>
+          <p:nvPr>
+            <p:ph sz="half" idx="2"/>
+          </p:nvPr>
+        </p:nvPicPr>
+        <p:blipFill>
+          <a:blip r:embed="rId2">
+            <a:extLst>
+              <a:ext uri="{28A0092B-C50C-407E-A947-70E740481C1C}">
+                <a14:useLocalDpi xmlns:a14="http://schemas.microsoft.com/office/drawing/2010/main" val="0"/>
+              </a:ext>
+            </a:extLst>
+          </a:blip>
+          <a:stretch>
+            <a:fillRect/>
+          </a:stretch>
+        </p:blipFill>
+        <p:spPr>
+          <a:xfrm>
+            <a:off x="6608802" y="1825625"/>
+            <a:ext cx="4308396" cy="4351338"/>
+          </a:xfrm>
+        </p:spPr>
+      </p:pic>
+    </p:spTree>
+    <p:extLst>
+      <p:ext uri="{BB962C8B-B14F-4D97-AF65-F5344CB8AC3E}">
+        <p14:creationId xmlns:p14="http://schemas.microsoft.com/office/powerpoint/2010/main" val="3245149999"/>
+      </p:ext>
+    </p:extLst>
+  </p:cSld>
+  <p:clrMapOvr>
+    <a:masterClrMapping/>
+  </p:clrMapOvr>
+</p:sld>
+</file>
+
+<file path=ppt/slides/slide49.xml><?xml version="1.0" encoding="utf-8"?>
 <p:sld xmlns:a="http://schemas.openxmlformats.org/drawingml/2006/main" xmlns:r="http://schemas.openxmlformats.org/officeDocument/2006/relationships" xmlns:p="http://schemas.openxmlformats.org/presentationml/2006/main">
   <p:cSld>
     <p:spTree>
@@ -43203,89 +43396,6 @@
 </p:sld>
 </file>
 
-<file path=ppt/slides/slide49.xml><?xml version="1.0" encoding="utf-8"?>
-<p:sld xmlns:a="http://schemas.openxmlformats.org/drawingml/2006/main" xmlns:r="http://schemas.openxmlformats.org/officeDocument/2006/relationships" xmlns:p="http://schemas.openxmlformats.org/presentationml/2006/main">
-  <p:cSld>
-    <p:spTree>
-      <p:nvGrpSpPr>
-        <p:cNvPr id="1" name=""/>
-        <p:cNvGrpSpPr/>
-        <p:nvPr/>
-      </p:nvGrpSpPr>
-      <p:grpSpPr>
-        <a:xfrm>
-          <a:off x="0" y="0"/>
-          <a:ext cx="0" cy="0"/>
-          <a:chOff x="0" y="0"/>
-          <a:chExt cx="0" cy="0"/>
-        </a:xfrm>
-      </p:grpSpPr>
-      <p:sp>
-        <p:nvSpPr>
-          <p:cNvPr id="5" name="Title 4">
-            <a:extLst>
-              <a:ext uri="{FF2B5EF4-FFF2-40B4-BE49-F238E27FC236}">
-                <a16:creationId xmlns:a16="http://schemas.microsoft.com/office/drawing/2014/main" id="{3FC00BEB-DAED-3146-8766-8589B64D26AD}"/>
-              </a:ext>
-            </a:extLst>
-          </p:cNvPr>
-          <p:cNvSpPr>
-            <a:spLocks noGrp="1"/>
-          </p:cNvSpPr>
-          <p:nvPr>
-            <p:ph type="ctrTitle"/>
-          </p:nvPr>
-        </p:nvSpPr>
-        <p:spPr/>
-        <p:txBody>
-          <a:bodyPr/>
-          <a:lstStyle/>
-          <a:p>
-            <a:r>
-              <a:rPr lang="en-US" dirty="0"/>
-              <a:t>Appendix</a:t>
-            </a:r>
-          </a:p>
-        </p:txBody>
-      </p:sp>
-      <p:sp>
-        <p:nvSpPr>
-          <p:cNvPr id="6" name="Subtitle 5">
-            <a:extLst>
-              <a:ext uri="{FF2B5EF4-FFF2-40B4-BE49-F238E27FC236}">
-                <a16:creationId xmlns:a16="http://schemas.microsoft.com/office/drawing/2014/main" id="{4B3712A0-23F8-E622-81B5-2E6B5CD087BF}"/>
-              </a:ext>
-            </a:extLst>
-          </p:cNvPr>
-          <p:cNvSpPr>
-            <a:spLocks noGrp="1"/>
-          </p:cNvSpPr>
-          <p:nvPr>
-            <p:ph type="subTitle" idx="1"/>
-          </p:nvPr>
-        </p:nvSpPr>
-        <p:spPr/>
-        <p:txBody>
-          <a:bodyPr/>
-          <a:lstStyle/>
-          <a:p>
-            <a:endParaRPr lang="en-US"/>
-          </a:p>
-        </p:txBody>
-      </p:sp>
-    </p:spTree>
-    <p:extLst>
-      <p:ext uri="{BB962C8B-B14F-4D97-AF65-F5344CB8AC3E}">
-        <p14:creationId xmlns:p14="http://schemas.microsoft.com/office/powerpoint/2010/main" val="4063471703"/>
-      </p:ext>
-    </p:extLst>
-  </p:cSld>
-  <p:clrMapOvr>
-    <a:masterClrMapping/>
-  </p:clrMapOvr>
-</p:sld>
-</file>
-
 <file path=ppt/slides/slide5.xml><?xml version="1.0" encoding="utf-8"?>
 <p:sld xmlns:a="http://schemas.openxmlformats.org/drawingml/2006/main" xmlns:r="http://schemas.openxmlformats.org/officeDocument/2006/relationships" xmlns:p="http://schemas.openxmlformats.org/presentationml/2006/main">
   <p:cSld>
@@ -43426,6 +43536,89 @@
 </file>
 
 <file path=ppt/slides/slide50.xml><?xml version="1.0" encoding="utf-8"?>
+<p:sld xmlns:a="http://schemas.openxmlformats.org/drawingml/2006/main" xmlns:r="http://schemas.openxmlformats.org/officeDocument/2006/relationships" xmlns:p="http://schemas.openxmlformats.org/presentationml/2006/main">
+  <p:cSld>
+    <p:spTree>
+      <p:nvGrpSpPr>
+        <p:cNvPr id="1" name=""/>
+        <p:cNvGrpSpPr/>
+        <p:nvPr/>
+      </p:nvGrpSpPr>
+      <p:grpSpPr>
+        <a:xfrm>
+          <a:off x="0" y="0"/>
+          <a:ext cx="0" cy="0"/>
+          <a:chOff x="0" y="0"/>
+          <a:chExt cx="0" cy="0"/>
+        </a:xfrm>
+      </p:grpSpPr>
+      <p:sp>
+        <p:nvSpPr>
+          <p:cNvPr id="5" name="Title 4">
+            <a:extLst>
+              <a:ext uri="{FF2B5EF4-FFF2-40B4-BE49-F238E27FC236}">
+                <a16:creationId xmlns:a16="http://schemas.microsoft.com/office/drawing/2014/main" id="{3FC00BEB-DAED-3146-8766-8589B64D26AD}"/>
+              </a:ext>
+            </a:extLst>
+          </p:cNvPr>
+          <p:cNvSpPr>
+            <a:spLocks noGrp="1"/>
+          </p:cNvSpPr>
+          <p:nvPr>
+            <p:ph type="ctrTitle"/>
+          </p:nvPr>
+        </p:nvSpPr>
+        <p:spPr/>
+        <p:txBody>
+          <a:bodyPr/>
+          <a:lstStyle/>
+          <a:p>
+            <a:r>
+              <a:rPr lang="en-US" dirty="0"/>
+              <a:t>Appendix</a:t>
+            </a:r>
+          </a:p>
+        </p:txBody>
+      </p:sp>
+      <p:sp>
+        <p:nvSpPr>
+          <p:cNvPr id="6" name="Subtitle 5">
+            <a:extLst>
+              <a:ext uri="{FF2B5EF4-FFF2-40B4-BE49-F238E27FC236}">
+                <a16:creationId xmlns:a16="http://schemas.microsoft.com/office/drawing/2014/main" id="{4B3712A0-23F8-E622-81B5-2E6B5CD087BF}"/>
+              </a:ext>
+            </a:extLst>
+          </p:cNvPr>
+          <p:cNvSpPr>
+            <a:spLocks noGrp="1"/>
+          </p:cNvSpPr>
+          <p:nvPr>
+            <p:ph type="subTitle" idx="1"/>
+          </p:nvPr>
+        </p:nvSpPr>
+        <p:spPr/>
+        <p:txBody>
+          <a:bodyPr/>
+          <a:lstStyle/>
+          <a:p>
+            <a:endParaRPr lang="en-US"/>
+          </a:p>
+        </p:txBody>
+      </p:sp>
+    </p:spTree>
+    <p:extLst>
+      <p:ext uri="{BB962C8B-B14F-4D97-AF65-F5344CB8AC3E}">
+        <p14:creationId xmlns:p14="http://schemas.microsoft.com/office/powerpoint/2010/main" val="4063471703"/>
+      </p:ext>
+    </p:extLst>
+  </p:cSld>
+  <p:clrMapOvr>
+    <a:masterClrMapping/>
+  </p:clrMapOvr>
+</p:sld>
+</file>
+
+<file path=ppt/slides/slide51.xml><?xml version="1.0" encoding="utf-8"?>
 <p:sld xmlns:a="http://schemas.openxmlformats.org/drawingml/2006/main" xmlns:r="http://schemas.openxmlformats.org/officeDocument/2006/relationships" xmlns:p="http://schemas.openxmlformats.org/presentationml/2006/main">
   <p:cSld>
     <p:spTree>
@@ -43675,7 +43868,7 @@
 </p:sld>
 </file>
 
-<file path=ppt/slides/slide51.xml><?xml version="1.0" encoding="utf-8"?>
+<file path=ppt/slides/slide52.xml><?xml version="1.0" encoding="utf-8"?>
 <p:sld xmlns:a="http://schemas.openxmlformats.org/drawingml/2006/main" xmlns:r="http://schemas.openxmlformats.org/officeDocument/2006/relationships" xmlns:p="http://schemas.openxmlformats.org/presentationml/2006/main">
   <p:cSld>
     <p:spTree>
@@ -44213,7 +44406,7 @@
 </p:sld>
 </file>
 
-<file path=ppt/slides/slide52.xml><?xml version="1.0" encoding="utf-8"?>
+<file path=ppt/slides/slide53.xml><?xml version="1.0" encoding="utf-8"?>
 <p:sld xmlns:a="http://schemas.openxmlformats.org/drawingml/2006/main" xmlns:r="http://schemas.openxmlformats.org/officeDocument/2006/relationships" xmlns:p="http://schemas.openxmlformats.org/presentationml/2006/main">
   <p:cSld>
     <p:spTree>
@@ -44921,7 +45114,7 @@
 </p:sld>
 </file>
 
-<file path=ppt/slides/slide53.xml><?xml version="1.0" encoding="utf-8"?>
+<file path=ppt/slides/slide54.xml><?xml version="1.0" encoding="utf-8"?>
 <p:sld xmlns:a="http://schemas.openxmlformats.org/drawingml/2006/main" xmlns:r="http://schemas.openxmlformats.org/officeDocument/2006/relationships" xmlns:p="http://schemas.openxmlformats.org/presentationml/2006/main">
   <p:cSld>
     <p:spTree>
@@ -45505,7 +45698,7 @@
           <p:nvPr/>
         </p:nvPicPr>
         <p:blipFill>
-          <a:blip r:embed="rId3">
+          <a:blip r:embed="rId2">
             <a:extLst>
               <a:ext uri="{28A0092B-C50C-407E-A947-70E740481C1C}">
                 <a14:useLocalDpi xmlns:a14="http://schemas.microsoft.com/office/drawing/2010/main" val="0"/>
@@ -45602,7 +45795,7 @@
           <p:nvPr/>
         </p:nvPicPr>
         <p:blipFill>
-          <a:blip r:embed="rId4">
+          <a:blip r:embed="rId3">
             <a:extLst>
               <a:ext uri="{28A0092B-C50C-407E-A947-70E740481C1C}">
                 <a14:useLocalDpi xmlns:a14="http://schemas.microsoft.com/office/drawing/2010/main" val="0"/>
@@ -45699,7 +45892,7 @@
           <p:nvPr/>
         </p:nvPicPr>
         <p:blipFill>
-          <a:blip r:embed="rId4">
+          <a:blip r:embed="rId3">
             <a:extLst>
               <a:ext uri="{28A0092B-C50C-407E-A947-70E740481C1C}">
                 <a14:useLocalDpi xmlns:a14="http://schemas.microsoft.com/office/drawing/2010/main" val="0"/>
@@ -45734,7 +45927,7 @@
       <p:sp>
         <p:nvSpPr>
           <p:cNvPr id="13" name="TextBox 12">
-            <a:hlinkClick r:id="rId5" action="ppaction://hlinksldjump"/>
+            <a:hlinkClick r:id="rId4" action="ppaction://hlinksldjump"/>
             <a:extLst>
               <a:ext uri="{FF2B5EF4-FFF2-40B4-BE49-F238E27FC236}">
                 <a16:creationId xmlns:a16="http://schemas.microsoft.com/office/drawing/2014/main" id="{62F8AA26-CB54-BF92-0913-225CBF4550E5}"/>
@@ -45762,7 +45955,7 @@
           <a:p>
             <a:r>
               <a:rPr lang="en-US" dirty="0">
-                <a:hlinkClick r:id="rId5" action="ppaction://hlinksldjump"/>
+                <a:hlinkClick r:id="rId4" action="ppaction://hlinksldjump"/>
               </a:rPr>
               <a:t>Back</a:t>
             </a:r>
@@ -45943,7 +46136,7 @@
 </p:sld>
 </file>
 
-<file path=ppt/slides/slide54.xml><?xml version="1.0" encoding="utf-8"?>
+<file path=ppt/slides/slide55.xml><?xml version="1.0" encoding="utf-8"?>
 <p:sld xmlns:a="http://schemas.openxmlformats.org/drawingml/2006/main" xmlns:r="http://schemas.openxmlformats.org/officeDocument/2006/relationships" xmlns:p="http://schemas.openxmlformats.org/presentationml/2006/main">
   <p:cSld>
     <p:spTree>
@@ -46065,7 +46258,7 @@
 </p:sld>
 </file>
 
-<file path=ppt/slides/slide55.xml><?xml version="1.0" encoding="utf-8"?>
+<file path=ppt/slides/slide56.xml><?xml version="1.0" encoding="utf-8"?>
 <p:sld xmlns:a="http://schemas.openxmlformats.org/drawingml/2006/main" xmlns:r="http://schemas.openxmlformats.org/officeDocument/2006/relationships" xmlns:p="http://schemas.openxmlformats.org/presentationml/2006/main">
   <p:cSld>
     <p:spTree>
@@ -46208,7 +46401,7 @@
 </p:sld>
 </file>
 
-<file path=ppt/slides/slide56.xml><?xml version="1.0" encoding="utf-8"?>
+<file path=ppt/slides/slide57.xml><?xml version="1.0" encoding="utf-8"?>
 <p:sld xmlns:a="http://schemas.openxmlformats.org/drawingml/2006/main" xmlns:r="http://schemas.openxmlformats.org/officeDocument/2006/relationships" xmlns:p="http://schemas.openxmlformats.org/presentationml/2006/main">
   <p:cSld>
     <p:spTree>
@@ -46334,7 +46527,7 @@
 </p:sld>
 </file>
 
-<file path=ppt/slides/slide57.xml><?xml version="1.0" encoding="utf-8"?>
+<file path=ppt/slides/slide58.xml><?xml version="1.0" encoding="utf-8"?>
 <p:sld xmlns:a="http://schemas.openxmlformats.org/drawingml/2006/main" xmlns:r="http://schemas.openxmlformats.org/officeDocument/2006/relationships" xmlns:p="http://schemas.openxmlformats.org/presentationml/2006/main">
   <p:cSld>
     <p:spTree>
@@ -46511,7 +46704,7 @@
 </p:sld>
 </file>
 
-<file path=ppt/slides/slide58.xml><?xml version="1.0" encoding="utf-8"?>
+<file path=ppt/slides/slide59.xml><?xml version="1.0" encoding="utf-8"?>
 <p:sld xmlns:a="http://schemas.openxmlformats.org/drawingml/2006/main" xmlns:r="http://schemas.openxmlformats.org/officeDocument/2006/relationships" xmlns:p="http://schemas.openxmlformats.org/presentationml/2006/main">
   <p:cSld>
     <p:spTree>
@@ -46733,7 +46926,138 @@
 </p:sld>
 </file>
 
-<file path=ppt/slides/slide59.xml><?xml version="1.0" encoding="utf-8"?>
+<file path=ppt/slides/slide6.xml><?xml version="1.0" encoding="utf-8"?>
+<p:sld xmlns:a="http://schemas.openxmlformats.org/drawingml/2006/main" xmlns:r="http://schemas.openxmlformats.org/officeDocument/2006/relationships" xmlns:p="http://schemas.openxmlformats.org/presentationml/2006/main">
+  <p:cSld>
+    <p:spTree>
+      <p:nvGrpSpPr>
+        <p:cNvPr id="1" name=""/>
+        <p:cNvGrpSpPr/>
+        <p:nvPr/>
+      </p:nvGrpSpPr>
+      <p:grpSpPr>
+        <a:xfrm>
+          <a:off x="0" y="0"/>
+          <a:ext cx="0" cy="0"/>
+          <a:chOff x="0" y="0"/>
+          <a:chExt cx="0" cy="0"/>
+        </a:xfrm>
+      </p:grpSpPr>
+      <p:sp>
+        <p:nvSpPr>
+          <p:cNvPr id="2" name="Title 1">
+            <a:extLst>
+              <a:ext uri="{FF2B5EF4-FFF2-40B4-BE49-F238E27FC236}">
+                <a16:creationId xmlns:a16="http://schemas.microsoft.com/office/drawing/2014/main" id="{57D45464-6028-3B14-7E64-1D54A7EBB618}"/>
+              </a:ext>
+            </a:extLst>
+          </p:cNvPr>
+          <p:cNvSpPr>
+            <a:spLocks noGrp="1"/>
+          </p:cNvSpPr>
+          <p:nvPr>
+            <p:ph type="title"/>
+          </p:nvPr>
+        </p:nvSpPr>
+        <p:spPr/>
+        <p:txBody>
+          <a:bodyPr/>
+          <a:lstStyle/>
+          <a:p>
+            <a:r>
+              <a:rPr lang="en-US" dirty="0"/>
+              <a:t>SNPE after Five Hundred Thousand Iterations</a:t>
+            </a:r>
+          </a:p>
+        </p:txBody>
+      </p:sp>
+      <p:sp>
+        <p:nvSpPr>
+          <p:cNvPr id="7" name="TextBox 6">
+            <a:extLst>
+              <a:ext uri="{FF2B5EF4-FFF2-40B4-BE49-F238E27FC236}">
+                <a16:creationId xmlns:a16="http://schemas.microsoft.com/office/drawing/2014/main" id="{C0BB6784-CB11-01CF-2B6D-3AD884D887BD}"/>
+              </a:ext>
+            </a:extLst>
+          </p:cNvPr>
+          <p:cNvSpPr txBox="1"/>
+          <p:nvPr/>
+        </p:nvSpPr>
+        <p:spPr>
+          <a:xfrm>
+            <a:off x="685799" y="6311900"/>
+            <a:ext cx="2371725" cy="369332"/>
+          </a:xfrm>
+          <a:prstGeom prst="rect">
+            <a:avLst/>
+          </a:prstGeom>
+          <a:noFill/>
+        </p:spPr>
+        <p:txBody>
+          <a:bodyPr wrap="square" rtlCol="0">
+            <a:spAutoFit/>
+          </a:bodyPr>
+          <a:lstStyle/>
+          <a:p>
+            <a:r>
+              <a:rPr lang="en-US" dirty="0">
+                <a:hlinkClick r:id="rId2" action="ppaction://hlinksldjump"/>
+              </a:rPr>
+              <a:t>Additional Parameters</a:t>
+            </a:r>
+            <a:endParaRPr lang="en-US" dirty="0"/>
+          </a:p>
+        </p:txBody>
+      </p:sp>
+      <p:pic>
+        <p:nvPicPr>
+          <p:cNvPr id="12" name="Content Placeholder 11" descr="A graph of a graph&#10;&#10;Description automatically generated">
+            <a:extLst>
+              <a:ext uri="{FF2B5EF4-FFF2-40B4-BE49-F238E27FC236}">
+                <a16:creationId xmlns:a16="http://schemas.microsoft.com/office/drawing/2014/main" id="{67247F15-BF6D-8261-E1CA-11DC863A1765}"/>
+              </a:ext>
+            </a:extLst>
+          </p:cNvPr>
+          <p:cNvPicPr>
+            <a:picLocks noGrp="1" noChangeAspect="1"/>
+          </p:cNvPicPr>
+          <p:nvPr>
+            <p:ph idx="1"/>
+          </p:nvPr>
+        </p:nvPicPr>
+        <p:blipFill>
+          <a:blip r:embed="rId3">
+            <a:extLst>
+              <a:ext uri="{28A0092B-C50C-407E-A947-70E740481C1C}">
+                <a14:useLocalDpi xmlns:a14="http://schemas.microsoft.com/office/drawing/2010/main" val="0"/>
+              </a:ext>
+            </a:extLst>
+          </a:blip>
+          <a:stretch>
+            <a:fillRect/>
+          </a:stretch>
+        </p:blipFill>
+        <p:spPr>
+          <a:xfrm>
+            <a:off x="838199" y="1825625"/>
+            <a:ext cx="10515599" cy="4351338"/>
+          </a:xfrm>
+        </p:spPr>
+      </p:pic>
+    </p:spTree>
+    <p:extLst>
+      <p:ext uri="{BB962C8B-B14F-4D97-AF65-F5344CB8AC3E}">
+        <p14:creationId xmlns:p14="http://schemas.microsoft.com/office/powerpoint/2010/main" val="1645393655"/>
+      </p:ext>
+    </p:extLst>
+  </p:cSld>
+  <p:clrMapOvr>
+    <a:masterClrMapping/>
+  </p:clrMapOvr>
+</p:sld>
+</file>
+
+<file path=ppt/slides/slide60.xml><?xml version="1.0" encoding="utf-8"?>
 <p:sld xmlns:a="http://schemas.openxmlformats.org/drawingml/2006/main" xmlns:r="http://schemas.openxmlformats.org/officeDocument/2006/relationships" xmlns:p="http://schemas.openxmlformats.org/presentationml/2006/main">
   <p:cSld>
     <p:spTree>
@@ -46930,138 +47254,7 @@
 </p:sld>
 </file>
 
-<file path=ppt/slides/slide6.xml><?xml version="1.0" encoding="utf-8"?>
-<p:sld xmlns:a="http://schemas.openxmlformats.org/drawingml/2006/main" xmlns:r="http://schemas.openxmlformats.org/officeDocument/2006/relationships" xmlns:p="http://schemas.openxmlformats.org/presentationml/2006/main">
-  <p:cSld>
-    <p:spTree>
-      <p:nvGrpSpPr>
-        <p:cNvPr id="1" name=""/>
-        <p:cNvGrpSpPr/>
-        <p:nvPr/>
-      </p:nvGrpSpPr>
-      <p:grpSpPr>
-        <a:xfrm>
-          <a:off x="0" y="0"/>
-          <a:ext cx="0" cy="0"/>
-          <a:chOff x="0" y="0"/>
-          <a:chExt cx="0" cy="0"/>
-        </a:xfrm>
-      </p:grpSpPr>
-      <p:sp>
-        <p:nvSpPr>
-          <p:cNvPr id="2" name="Title 1">
-            <a:extLst>
-              <a:ext uri="{FF2B5EF4-FFF2-40B4-BE49-F238E27FC236}">
-                <a16:creationId xmlns:a16="http://schemas.microsoft.com/office/drawing/2014/main" id="{57D45464-6028-3B14-7E64-1D54A7EBB618}"/>
-              </a:ext>
-            </a:extLst>
-          </p:cNvPr>
-          <p:cNvSpPr>
-            <a:spLocks noGrp="1"/>
-          </p:cNvSpPr>
-          <p:nvPr>
-            <p:ph type="title"/>
-          </p:nvPr>
-        </p:nvSpPr>
-        <p:spPr/>
-        <p:txBody>
-          <a:bodyPr/>
-          <a:lstStyle/>
-          <a:p>
-            <a:r>
-              <a:rPr lang="en-US" dirty="0"/>
-              <a:t>SNPE after Five Hundred Thousand Iterations</a:t>
-            </a:r>
-          </a:p>
-        </p:txBody>
-      </p:sp>
-      <p:sp>
-        <p:nvSpPr>
-          <p:cNvPr id="7" name="TextBox 6">
-            <a:extLst>
-              <a:ext uri="{FF2B5EF4-FFF2-40B4-BE49-F238E27FC236}">
-                <a16:creationId xmlns:a16="http://schemas.microsoft.com/office/drawing/2014/main" id="{C0BB6784-CB11-01CF-2B6D-3AD884D887BD}"/>
-              </a:ext>
-            </a:extLst>
-          </p:cNvPr>
-          <p:cNvSpPr txBox="1"/>
-          <p:nvPr/>
-        </p:nvSpPr>
-        <p:spPr>
-          <a:xfrm>
-            <a:off x="685799" y="6311900"/>
-            <a:ext cx="2371725" cy="369332"/>
-          </a:xfrm>
-          <a:prstGeom prst="rect">
-            <a:avLst/>
-          </a:prstGeom>
-          <a:noFill/>
-        </p:spPr>
-        <p:txBody>
-          <a:bodyPr wrap="square" rtlCol="0">
-            <a:spAutoFit/>
-          </a:bodyPr>
-          <a:lstStyle/>
-          <a:p>
-            <a:r>
-              <a:rPr lang="en-US" dirty="0">
-                <a:hlinkClick r:id="rId2" action="ppaction://hlinksldjump"/>
-              </a:rPr>
-              <a:t>Additional Parameters</a:t>
-            </a:r>
-            <a:endParaRPr lang="en-US" dirty="0"/>
-          </a:p>
-        </p:txBody>
-      </p:sp>
-      <p:pic>
-        <p:nvPicPr>
-          <p:cNvPr id="12" name="Content Placeholder 11" descr="A graph of a graph&#10;&#10;Description automatically generated">
-            <a:extLst>
-              <a:ext uri="{FF2B5EF4-FFF2-40B4-BE49-F238E27FC236}">
-                <a16:creationId xmlns:a16="http://schemas.microsoft.com/office/drawing/2014/main" id="{67247F15-BF6D-8261-E1CA-11DC863A1765}"/>
-              </a:ext>
-            </a:extLst>
-          </p:cNvPr>
-          <p:cNvPicPr>
-            <a:picLocks noGrp="1" noChangeAspect="1"/>
-          </p:cNvPicPr>
-          <p:nvPr>
-            <p:ph idx="1"/>
-          </p:nvPr>
-        </p:nvPicPr>
-        <p:blipFill>
-          <a:blip r:embed="rId3">
-            <a:extLst>
-              <a:ext uri="{28A0092B-C50C-407E-A947-70E740481C1C}">
-                <a14:useLocalDpi xmlns:a14="http://schemas.microsoft.com/office/drawing/2010/main" val="0"/>
-              </a:ext>
-            </a:extLst>
-          </a:blip>
-          <a:stretch>
-            <a:fillRect/>
-          </a:stretch>
-        </p:blipFill>
-        <p:spPr>
-          <a:xfrm>
-            <a:off x="838199" y="1825625"/>
-            <a:ext cx="10515599" cy="4351338"/>
-          </a:xfrm>
-        </p:spPr>
-      </p:pic>
-    </p:spTree>
-    <p:extLst>
-      <p:ext uri="{BB962C8B-B14F-4D97-AF65-F5344CB8AC3E}">
-        <p14:creationId xmlns:p14="http://schemas.microsoft.com/office/powerpoint/2010/main" val="1645393655"/>
-      </p:ext>
-    </p:extLst>
-  </p:cSld>
-  <p:clrMapOvr>
-    <a:masterClrMapping/>
-  </p:clrMapOvr>
-</p:sld>
-</file>
-
-<file path=ppt/slides/slide60.xml><?xml version="1.0" encoding="utf-8"?>
+<file path=ppt/slides/slide61.xml><?xml version="1.0" encoding="utf-8"?>
 <p:sld xmlns:a="http://schemas.openxmlformats.org/drawingml/2006/main" xmlns:r="http://schemas.openxmlformats.org/officeDocument/2006/relationships" xmlns:p="http://schemas.openxmlformats.org/presentationml/2006/main">
   <p:cSld>
     <p:spTree>
@@ -47187,7 +47380,7 @@
 </p:sld>
 </file>
 
-<file path=ppt/slides/slide61.xml><?xml version="1.0" encoding="utf-8"?>
+<file path=ppt/slides/slide62.xml><?xml version="1.0" encoding="utf-8"?>
 <p:sld xmlns:a="http://schemas.openxmlformats.org/drawingml/2006/main" xmlns:r="http://schemas.openxmlformats.org/officeDocument/2006/relationships" xmlns:p="http://schemas.openxmlformats.org/presentationml/2006/main">
   <p:cSld>
     <p:spTree>
@@ -47313,7 +47506,7 @@
 </p:sld>
 </file>
 
-<file path=ppt/slides/slide62.xml><?xml version="1.0" encoding="utf-8"?>
+<file path=ppt/slides/slide63.xml><?xml version="1.0" encoding="utf-8"?>
 <p:sld xmlns:a="http://schemas.openxmlformats.org/drawingml/2006/main" xmlns:r="http://schemas.openxmlformats.org/officeDocument/2006/relationships" xmlns:p="http://schemas.openxmlformats.org/presentationml/2006/main">
   <p:cSld>
     <p:spTree>

--- a/files/SNPE_Presentation.pptx
+++ b/files/SNPE_Presentation.pptx
@@ -35024,8 +35024,12 @@
               <a:t>Krusell</a:t>
             </a:r>
             <a:r>
+              <a:rPr lang="en-US"/>
+              <a:t>-Smith </a:t>
+            </a:r>
+            <a:r>
               <a:rPr lang="en-US" dirty="0"/>
-              <a:t> Smith model solved via </a:t>
+              <a:t>model solved via </a:t>
             </a:r>
             <a:r>
               <a:rPr lang="en-US" dirty="0" err="1"/>
@@ -43145,23 +43149,7 @@
             </a:r>
             <a:r>
               <a:rPr lang="en-US" dirty="0"/>
-              <a:t> </a:t>
-            </a:r>
-            <a:r>
-              <a:rPr lang="en-US"/>
-              <a:t>model estimated across time </a:t>
-            </a:r>
-            <a:r>
-              <a:rPr lang="en-US" dirty="0"/>
-              <a:t>on 100 microdata </a:t>
-            </a:r>
-            <a:r>
-              <a:rPr lang="en-US"/>
-              <a:t>quantiles created </a:t>
-            </a:r>
-            <a:r>
-              <a:rPr lang="en-US" dirty="0"/>
-              <a:t>from the total household net worth variable in the SIPP dataset combined with macro data</a:t>
+              <a:t> model estimated across time on 100 microdata quantiles created from the total household net worth variable in the SIPP dataset combined with macro data</a:t>
             </a:r>
           </a:p>
           <a:p>
